--- a/Lecture4_HelloArmor_装甲板位姿解算.pptx
+++ b/Lecture4_HelloArmor_装甲板位姿解算.pptx
@@ -6166,7 +6166,7 @@
                 </a:solidFill>
                 <a:latin typeface="Microsoft YaHei"/>
               </a:rPr>
-              <a:t>· 提示：原点在板中心，x 向右为正、y 向下为正，半宽 = ARMOR_WIDTH/2，半高 = LIGHTBAR_LENGTH/2</a:t>
+              <a:t>· 提示：原点在板中心，x 向右为正、y 向下为正，半宽 = ARMOR_WIDTH/2，半高 = LIGHTBAR_LENGTH/2；请用 ± ARMOR_WIDTH / 2 这样的表达式填写（代码中的模板已被注释，先解注释再填）</a:t>
             </a:r>
           </a:p>
         </p:txBody>
@@ -8463,7 +8463,7 @@
                 </a:solidFill>
                 <a:latin typeface="Consolas"/>
               </a:rPr>
-              <a:t>4 min</a:t>
+              <a:t>3 min</a:t>
             </a:r>
           </a:p>
         </p:txBody>
